--- a/20_Projects/企業のオンライン保健室/クラウドパワー株式会社/02_報告会記録/クラウドパワー様_アンケート結果_2026年6月.pptx
+++ b/20_Projects/企業のオンライン保健室/クラウドパワー株式会社/02_報告会記録/クラウドパワー様_アンケート結果_2026年6月.pptx
@@ -5784,8 +5784,8 @@
         </p:nvSpPr>
         <p:spPr>
           <a:xfrm>
-            <a:off x="457200" y="1005840"/>
-            <a:ext cx="8229600" cy="1554480"/>
+            <a:off x="457200" y="914400"/>
+            <a:ext cx="8229600" cy="1280160"/>
           </a:xfrm>
           <a:prstGeom prst="rect">
             <a:avLst/>
@@ -5827,8 +5827,8 @@
         </p:nvSpPr>
         <p:spPr>
           <a:xfrm>
-            <a:off x="640080" y="1051560"/>
-            <a:ext cx="7315200" cy="411480"/>
+            <a:off x="640080" y="960120"/>
+            <a:ext cx="7315200" cy="347472"/>
           </a:xfrm>
           <a:prstGeom prst="rect">
             <a:avLst/>
@@ -5843,7 +5843,7 @@
           <a:p>
             <a:pPr algn="l"/>
             <a:r>
-              <a:rPr sz="1200" b="1">
+              <a:rPr sz="1100" b="1">
                 <a:solidFill>
                   <a:srgbClr val="1E3A5F"/>
                 </a:solidFill>
@@ -5861,8 +5861,8 @@
         </p:nvSpPr>
         <p:spPr>
           <a:xfrm>
-            <a:off x="640080" y="1463040"/>
-            <a:ext cx="7772400" cy="914400"/>
+            <a:off x="640080" y="1307592"/>
+            <a:ext cx="7772400" cy="731520"/>
           </a:xfrm>
           <a:prstGeom prst="rect">
             <a:avLst/>
@@ -5877,27 +5877,69 @@
           <a:p>
             <a:pPr algn="l"/>
             <a:r>
-              <a:rPr sz="1200" b="0">
+              <a:rPr sz="1100" b="0">
                 <a:solidFill>
                   <a:srgbClr val="1E3A5F"/>
                 </a:solidFill>
               </a:rPr>
-              <a:t>「社長の意見が絶対になってしまうため、
-社長のいない会話の場を設ける必要があると考えている」</a:t>
-            </a:r>
-          </a:p>
-        </p:txBody>
-      </p:sp>
-      <p:sp>
-        <p:nvSpPr>
-          <p:cNvPr id="8" name="TextBox 7"/>
+              <a:t>「社長の意見が絶対になってしまうため、社長のいない会話の場を設ける必要があると考えている」</a:t>
+            </a:r>
+          </a:p>
+        </p:txBody>
+      </p:sp>
+      <p:sp>
+        <p:nvSpPr>
+          <p:cNvPr id="8" name="Rectangle 7"/>
+          <p:cNvSpPr/>
+          <p:nvPr/>
+        </p:nvSpPr>
+        <p:spPr>
+          <a:xfrm>
+            <a:off x="457200" y="2331720"/>
+            <a:ext cx="2011680" cy="347472"/>
+          </a:xfrm>
+          <a:prstGeom prst="rect">
+            <a:avLst/>
+          </a:prstGeom>
+          <a:solidFill>
+            <a:srgbClr val="74B2E0"/>
+          </a:solidFill>
+          <a:ln>
+            <a:noFill/>
+          </a:ln>
+        </p:spPr>
+        <p:style>
+          <a:lnRef idx="1">
+            <a:schemeClr val="accent1"/>
+          </a:lnRef>
+          <a:fillRef idx="3">
+            <a:schemeClr val="accent1"/>
+          </a:fillRef>
+          <a:effectRef idx="2">
+            <a:schemeClr val="accent1"/>
+          </a:effectRef>
+          <a:fontRef idx="minor">
+            <a:schemeClr val="lt1"/>
+          </a:fontRef>
+        </p:style>
+        <p:txBody>
+          <a:bodyPr rtlCol="0" anchor="ctr"/>
+          <a:lstStyle/>
+          <a:p>
+            <a:pPr algn="ctr"/>
+          </a:p>
+        </p:txBody>
+      </p:sp>
+      <p:sp>
+        <p:nvSpPr>
+          <p:cNvPr id="9" name="TextBox 8"/>
           <p:cNvSpPr txBox="1"/>
           <p:nvPr/>
         </p:nvSpPr>
         <p:spPr>
           <a:xfrm>
-            <a:off x="457200" y="2743200"/>
-            <a:ext cx="8229600" cy="411480"/>
+            <a:off x="548640" y="2359152"/>
+            <a:ext cx="1920240" cy="320040"/>
           </a:xfrm>
           <a:prstGeom prst="rect">
             <a:avLst/>
@@ -5912,26 +5954,26 @@
           <a:p>
             <a:pPr algn="l"/>
             <a:r>
-              <a:rPr sz="1400" b="1">
-                <a:solidFill>
-                  <a:srgbClr val="1E3A5F"/>
+              <a:rPr sz="1000" b="1">
+                <a:solidFill>
+                  <a:srgbClr val="FFFFFF"/>
                 </a:solidFill>
               </a:rPr>
-              <a:t>総括</a:t>
-            </a:r>
-          </a:p>
-        </p:txBody>
-      </p:sp>
-      <p:sp>
-        <p:nvSpPr>
-          <p:cNvPr id="9" name="TextBox 8"/>
+              <a:t>事実：データが示していること</a:t>
+            </a:r>
+          </a:p>
+        </p:txBody>
+      </p:sp>
+      <p:sp>
+        <p:nvSpPr>
+          <p:cNvPr id="10" name="TextBox 9"/>
           <p:cNvSpPr txBox="1"/>
           <p:nvPr/>
         </p:nvSpPr>
         <p:spPr>
           <a:xfrm>
-            <a:off x="457200" y="3246120"/>
-            <a:ext cx="8229600" cy="548640"/>
+            <a:off x="457200" y="2743200"/>
+            <a:ext cx="8229600" cy="347472"/>
           </a:xfrm>
           <a:prstGeom prst="rect">
             <a:avLst/>
@@ -5946,26 +5988,26 @@
           <a:p>
             <a:pPr algn="l"/>
             <a:r>
-              <a:rPr sz="1100" b="0">
+              <a:rPr sz="1000" b="0">
                 <a:solidFill>
                   <a:srgbClr val="333333"/>
                 </a:solidFill>
               </a:rPr>
-              <a:t>・保健室への期待はあるが、「自分で解決する」文化が根強く相談のハードルが高い状態</a:t>
-            </a:r>
-          </a:p>
-        </p:txBody>
-      </p:sp>
-      <p:sp>
-        <p:nvSpPr>
-          <p:cNvPr id="10" name="TextBox 9"/>
+              <a:t>・保健室への期待は高い（健康・ストレス相談 各60%）</a:t>
+            </a:r>
+          </a:p>
+        </p:txBody>
+      </p:sp>
+      <p:sp>
+        <p:nvSpPr>
+          <p:cNvPr id="11" name="TextBox 10"/>
           <p:cNvSpPr txBox="1"/>
           <p:nvPr/>
         </p:nvSpPr>
         <p:spPr>
           <a:xfrm>
-            <a:off x="457200" y="3840480"/>
-            <a:ext cx="8229600" cy="548640"/>
+            <a:off x="457200" y="3090672"/>
+            <a:ext cx="8229600" cy="347472"/>
           </a:xfrm>
           <a:prstGeom prst="rect">
             <a:avLst/>
@@ -5980,26 +6022,26 @@
           <a:p>
             <a:pPr algn="l"/>
             <a:r>
-              <a:rPr sz="1100" b="0">
+              <a:rPr sz="1000" b="0">
                 <a:solidFill>
                   <a:srgbClr val="333333"/>
                 </a:solidFill>
               </a:rPr>
-              <a:t>・Q3「仕事の進め方」の背景確認が今後の関わり方の鍵</a:t>
-            </a:r>
-          </a:p>
-        </p:txBody>
-      </p:sp>
-      <p:sp>
-        <p:nvSpPr>
-          <p:cNvPr id="11" name="TextBox 10"/>
+              <a:t>・困った時は「自分で解決」が80%、「専門家」は0%</a:t>
+            </a:r>
+          </a:p>
+        </p:txBody>
+      </p:sp>
+      <p:sp>
+        <p:nvSpPr>
+          <p:cNvPr id="12" name="TextBox 11"/>
           <p:cNvSpPr txBox="1"/>
           <p:nvPr/>
         </p:nvSpPr>
         <p:spPr>
           <a:xfrm>
-            <a:off x="457200" y="4434840"/>
-            <a:ext cx="8229600" cy="548640"/>
+            <a:off x="457200" y="3438144"/>
+            <a:ext cx="8229600" cy="347472"/>
           </a:xfrm>
           <a:prstGeom prst="rect">
             <a:avLst/>
@@ -6014,26 +6056,69 @@
           <a:p>
             <a:pPr algn="l"/>
             <a:r>
-              <a:rPr sz="1100" b="0">
+              <a:rPr sz="1000" b="0">
                 <a:solidFill>
                   <a:srgbClr val="333333"/>
                 </a:solidFill>
               </a:rPr>
-              <a:t>・「特に必要ない」40%を踏まえ、押しつけにならない関わり方の設計が重要</a:t>
-            </a:r>
-          </a:p>
-        </p:txBody>
-      </p:sp>
-      <p:sp>
-        <p:nvSpPr>
-          <p:cNvPr id="12" name="TextBox 11"/>
+              <a:t>・変えたいことのトップは「仕事の進め方」60%</a:t>
+            </a:r>
+          </a:p>
+        </p:txBody>
+      </p:sp>
+      <p:sp>
+        <p:nvSpPr>
+          <p:cNvPr id="13" name="Rectangle 12"/>
+          <p:cNvSpPr/>
+          <p:nvPr/>
+        </p:nvSpPr>
+        <p:spPr>
+          <a:xfrm>
+            <a:off x="457200" y="3803904"/>
+            <a:ext cx="2011680" cy="347472"/>
+          </a:xfrm>
+          <a:prstGeom prst="rect">
+            <a:avLst/>
+          </a:prstGeom>
+          <a:solidFill>
+            <a:srgbClr val="74B2E0"/>
+          </a:solidFill>
+          <a:ln>
+            <a:noFill/>
+          </a:ln>
+        </p:spPr>
+        <p:style>
+          <a:lnRef idx="1">
+            <a:schemeClr val="accent1"/>
+          </a:lnRef>
+          <a:fillRef idx="3">
+            <a:schemeClr val="accent1"/>
+          </a:fillRef>
+          <a:effectRef idx="2">
+            <a:schemeClr val="accent1"/>
+          </a:effectRef>
+          <a:fontRef idx="minor">
+            <a:schemeClr val="lt1"/>
+          </a:fontRef>
+        </p:style>
+        <p:txBody>
+          <a:bodyPr rtlCol="0" anchor="ctr"/>
+          <a:lstStyle/>
+          <a:p>
+            <a:pPr algn="ctr"/>
+          </a:p>
+        </p:txBody>
+      </p:sp>
+      <p:sp>
+        <p:nvSpPr>
+          <p:cNvPr id="14" name="TextBox 13"/>
           <p:cNvSpPr txBox="1"/>
           <p:nvPr/>
         </p:nvSpPr>
         <p:spPr>
           <a:xfrm>
-            <a:off x="457200" y="5029200"/>
-            <a:ext cx="8229600" cy="548640"/>
+            <a:off x="548640" y="3831336"/>
+            <a:ext cx="1920240" cy="320040"/>
           </a:xfrm>
           <a:prstGeom prst="rect">
             <a:avLst/>
@@ -6048,12 +6133,192 @@
           <a:p>
             <a:pPr algn="l"/>
             <a:r>
+              <a:rPr sz="1000" b="1">
+                <a:solidFill>
+                  <a:srgbClr val="FFFFFF"/>
+                </a:solidFill>
+              </a:rPr>
+              <a:t>考察：データから言えること</a:t>
+            </a:r>
+          </a:p>
+        </p:txBody>
+      </p:sp>
+      <p:sp>
+        <p:nvSpPr>
+          <p:cNvPr id="15" name="TextBox 14"/>
+          <p:cNvSpPr txBox="1"/>
+          <p:nvPr/>
+        </p:nvSpPr>
+        <p:spPr>
+          <a:xfrm>
+            <a:off x="457200" y="4206240"/>
+            <a:ext cx="8229600" cy="347472"/>
+          </a:xfrm>
+          <a:prstGeom prst="rect">
+            <a:avLst/>
+          </a:prstGeom>
+          <a:noFill/>
+        </p:spPr>
+        <p:txBody>
+          <a:bodyPr wrap="square">
+            <a:spAutoFit/>
+          </a:bodyPr>
+          <a:lstStyle/>
+          <a:p>
+            <a:pPr algn="l"/>
+            <a:r>
+              <a:rPr sz="1000" b="0">
+                <a:solidFill>
+                  <a:srgbClr val="333333"/>
+                </a:solidFill>
+              </a:rPr>
+              <a:t>・相談したい気持ちはあるが、相談できる場や文化がまだ育っていない</a:t>
+            </a:r>
+          </a:p>
+        </p:txBody>
+      </p:sp>
+      <p:sp>
+        <p:nvSpPr>
+          <p:cNvPr id="16" name="TextBox 15"/>
+          <p:cNvSpPr txBox="1"/>
+          <p:nvPr/>
+        </p:nvSpPr>
+        <p:spPr>
+          <a:xfrm>
+            <a:off x="457200" y="4553712"/>
+            <a:ext cx="8229600" cy="347472"/>
+          </a:xfrm>
+          <a:prstGeom prst="rect">
+            <a:avLst/>
+          </a:prstGeom>
+          <a:noFill/>
+        </p:spPr>
+        <p:txBody>
+          <a:bodyPr wrap="square">
+            <a:spAutoFit/>
+          </a:bodyPr>
+          <a:lstStyle/>
+          <a:p>
+            <a:pPr algn="l"/>
+            <a:r>
+              <a:rPr sz="1000" b="0">
+                <a:solidFill>
+                  <a:srgbClr val="333333"/>
+                </a:solidFill>
+              </a:rPr>
+              <a:t>・「仕事の進め方を変えたい」背景は何か　→　直接確認が必要</a:t>
+            </a:r>
+          </a:p>
+        </p:txBody>
+      </p:sp>
+      <p:sp>
+        <p:nvSpPr>
+          <p:cNvPr id="17" name="Rectangle 16"/>
+          <p:cNvSpPr/>
+          <p:nvPr/>
+        </p:nvSpPr>
+        <p:spPr>
+          <a:xfrm>
+            <a:off x="457200" y="4956048"/>
+            <a:ext cx="731520" cy="347472"/>
+          </a:xfrm>
+          <a:prstGeom prst="rect">
+            <a:avLst/>
+          </a:prstGeom>
+          <a:solidFill>
+            <a:srgbClr val="74B2E0"/>
+          </a:solidFill>
+          <a:ln>
+            <a:noFill/>
+          </a:ln>
+        </p:spPr>
+        <p:style>
+          <a:lnRef idx="1">
+            <a:schemeClr val="accent1"/>
+          </a:lnRef>
+          <a:fillRef idx="3">
+            <a:schemeClr val="accent1"/>
+          </a:fillRef>
+          <a:effectRef idx="2">
+            <a:schemeClr val="accent1"/>
+          </a:effectRef>
+          <a:fontRef idx="minor">
+            <a:schemeClr val="lt1"/>
+          </a:fontRef>
+        </p:style>
+        <p:txBody>
+          <a:bodyPr rtlCol="0" anchor="ctr"/>
+          <a:lstStyle/>
+          <a:p>
+            <a:pPr algn="ctr"/>
+          </a:p>
+        </p:txBody>
+      </p:sp>
+      <p:sp>
+        <p:nvSpPr>
+          <p:cNvPr id="18" name="TextBox 17"/>
+          <p:cNvSpPr txBox="1"/>
+          <p:nvPr/>
+        </p:nvSpPr>
+        <p:spPr>
+          <a:xfrm>
+            <a:off x="548640" y="4983480"/>
+            <a:ext cx="640080" cy="320040"/>
+          </a:xfrm>
+          <a:prstGeom prst="rect">
+            <a:avLst/>
+          </a:prstGeom>
+          <a:noFill/>
+        </p:spPr>
+        <p:txBody>
+          <a:bodyPr wrap="square">
+            <a:spAutoFit/>
+          </a:bodyPr>
+          <a:lstStyle/>
+          <a:p>
+            <a:pPr algn="l"/>
+            <a:r>
+              <a:rPr sz="1000" b="1">
+                <a:solidFill>
+                  <a:srgbClr val="FFFFFF"/>
+                </a:solidFill>
+              </a:rPr>
+              <a:t>総括</a:t>
+            </a:r>
+          </a:p>
+        </p:txBody>
+      </p:sp>
+      <p:sp>
+        <p:nvSpPr>
+          <p:cNvPr id="19" name="TextBox 18"/>
+          <p:cNvSpPr txBox="1"/>
+          <p:nvPr/>
+        </p:nvSpPr>
+        <p:spPr>
+          <a:xfrm>
+            <a:off x="457200" y="5349240"/>
+            <a:ext cx="8229600" cy="822960"/>
+          </a:xfrm>
+          <a:prstGeom prst="rect">
+            <a:avLst/>
+          </a:prstGeom>
+          <a:noFill/>
+        </p:spPr>
+        <p:txBody>
+          <a:bodyPr wrap="square">
+            <a:spAutoFit/>
+          </a:bodyPr>
+          <a:lstStyle/>
+          <a:p>
+            <a:pPr algn="l"/>
+            <a:r>
               <a:rPr sz="1100" b="0">
                 <a:solidFill>
-                  <a:srgbClr val="333333"/>
+                  <a:srgbClr val="1E3A5F"/>
                 </a:solidFill>
               </a:rPr>
-              <a:t>・Q7は1名の個人意見として参考情報に留める</a:t>
+              <a:t>皆で話せる機会を作り、「仕事の進め方をどのように変えたらどうなるのか？」
+について話し合いをして見られたらいかがでしょうか？</a:t>
             </a:r>
           </a:p>
         </p:txBody>

--- a/20_Projects/企業のオンライン保健室/クラウドパワー株式会社/02_報告会記録/クラウドパワー様_アンケート結果_2026年6月.pptx
+++ b/20_Projects/企業のオンライン保健室/クラウドパワー株式会社/02_報告会記録/クラウドパワー様_アンケート結果_2026年6月.pptx
@@ -6296,8 +6296,8 @@
         </p:nvSpPr>
         <p:spPr>
           <a:xfrm>
-            <a:off x="457200" y="5349240"/>
-            <a:ext cx="8229600" cy="822960"/>
+            <a:off x="457200" y="5376672"/>
+            <a:ext cx="8412480" cy="384048"/>
           </a:xfrm>
           <a:prstGeom prst="rect">
             <a:avLst/>
@@ -6317,8 +6317,75 @@
                   <a:srgbClr val="1E3A5F"/>
                 </a:solidFill>
               </a:rPr>
-              <a:t>皆で話せる機会を作り、「仕事の進め方をどのように変えたらどうなるのか？」
-について話し合いをして見られたらいかがでしょうか？</a:t>
+              <a:t>・利用されない主な理由：「何をするところか分からない」「一人で解決が当たり前」の2点</a:t>
+            </a:r>
+          </a:p>
+        </p:txBody>
+      </p:sp>
+      <p:sp>
+        <p:nvSpPr>
+          <p:cNvPr id="20" name="TextBox 19"/>
+          <p:cNvSpPr txBox="1"/>
+          <p:nvPr/>
+        </p:nvSpPr>
+        <p:spPr>
+          <a:xfrm>
+            <a:off x="457200" y="5788152"/>
+            <a:ext cx="8412480" cy="384048"/>
+          </a:xfrm>
+          <a:prstGeom prst="rect">
+            <a:avLst/>
+          </a:prstGeom>
+          <a:noFill/>
+        </p:spPr>
+        <p:txBody>
+          <a:bodyPr wrap="square">
+            <a:spAutoFit/>
+          </a:bodyPr>
+          <a:lstStyle/>
+          <a:p>
+            <a:pPr algn="l"/>
+            <a:r>
+              <a:rPr sz="1100" b="0">
+                <a:solidFill>
+                  <a:srgbClr val="1E3A5F"/>
+                </a:solidFill>
+              </a:rPr>
+              <a:t>・今後①　保健室の役割・できることを全員に伝え直す</a:t>
+            </a:r>
+          </a:p>
+        </p:txBody>
+      </p:sp>
+      <p:sp>
+        <p:nvSpPr>
+          <p:cNvPr id="21" name="TextBox 20"/>
+          <p:cNvSpPr txBox="1"/>
+          <p:nvPr/>
+        </p:nvSpPr>
+        <p:spPr>
+          <a:xfrm>
+            <a:off x="457200" y="6199632"/>
+            <a:ext cx="8412480" cy="384048"/>
+          </a:xfrm>
+          <a:prstGeom prst="rect">
+            <a:avLst/>
+          </a:prstGeom>
+          <a:noFill/>
+        </p:spPr>
+        <p:txBody>
+          <a:bodyPr wrap="square">
+            <a:spAutoFit/>
+          </a:bodyPr>
+          <a:lstStyle/>
+          <a:p>
+            <a:pPr algn="l"/>
+            <a:r>
+              <a:rPr sz="1100" b="0">
+                <a:solidFill>
+                  <a:srgbClr val="1E3A5F"/>
+                </a:solidFill>
+              </a:rPr>
+              <a:t>・今後②　「ちょっと話したい」が言いやすい入口をつくる</a:t>
             </a:r>
           </a:p>
         </p:txBody>
